--- a/output/wordlabs-create-3day.pptx
+++ b/output/wordlabs-create-3day.pptx
@@ -4240,7 +4240,7 @@
                 <a:ea typeface="Calibri" pitchFamily="34" charset="-122"/>
                 <a:cs typeface="Calibri" pitchFamily="34" charset="-120"/>
               </a:rPr>
-              <a:t>"to make or bring forth"</a:t>
+              <a:t>"make or bring into existence"</a:t>
             </a:r>
             <a:endParaRPr lang="en-US" sz="2200" dirty="0"/>
           </a:p>
@@ -5288,7 +5288,7 @@
                 <a:ea typeface="Calibri" pitchFamily="34" charset="-122"/>
                 <a:cs typeface="Calibri" pitchFamily="34" charset="-120"/>
               </a:rPr>
-              <a:t>Word Labs  •  wordlabs.app  •  Root: 'create' = to make or bring forth</a:t>
+              <a:t>Word Labs  •  wordlabs.app  •  Root: 'create' = make or bring into existence</a:t>
             </a:r>
             <a:endParaRPr lang="en-US" sz="800" dirty="0"/>
           </a:p>
@@ -5622,7 +5622,7 @@
                 <a:ea typeface="Trebuchet MS" pitchFamily="34" charset="-122"/>
                 <a:cs typeface="Trebuchet MS" pitchFamily="34" charset="-120"/>
               </a:rPr>
-              <a:t>1</a:t>
+              <a:t>0</a:t>
             </a:r>
             <a:pPr algn="ctr" indent="0" marL="0">
               <a:buNone/>
@@ -5928,7 +5928,7 @@
                 <a:ea typeface="Calibri" pitchFamily="34" charset="-122"/>
                 <a:cs typeface="Calibri" pitchFamily="34" charset="-120"/>
               </a:rPr>
-              <a:t>Word Labs  •  wordlabs.app  •  Root: 'create' = to make or bring forth</a:t>
+              <a:t>Word Labs  •  wordlabs.app  •  Root: 'create' = make or bring into existence</a:t>
             </a:r>
             <a:endParaRPr lang="en-US" sz="800" dirty="0"/>
           </a:p>
@@ -6040,7 +6040,7 @@
                 <a:ea typeface="Calibri" pitchFamily="34" charset="-122"/>
                 <a:cs typeface="Calibri" pitchFamily="34" charset="-120"/>
               </a:rPr>
-              <a:t>Our most </a:t>
+              <a:t>The </a:t>
             </a:r>
             <a:pPr algn="l" indent="0" marL="0">
               <a:buNone/>
@@ -6071,7 +6071,7 @@
                 <a:ea typeface="Calibri" pitchFamily="34" charset="-122"/>
                 <a:cs typeface="Calibri" pitchFamily="34" charset="-120"/>
               </a:rPr>
-              <a:t> student won first prize for her amazing </a:t>
+              <a:t> student won an award for her amazing </a:t>
             </a:r>
             <a:pPr algn="l" indent="0" marL="0">
               <a:buNone/>
@@ -6102,7 +6102,7 @@
                 <a:ea typeface="Calibri" pitchFamily="34" charset="-122"/>
                 <a:cs typeface="Calibri" pitchFamily="34" charset="-120"/>
               </a:rPr>
-              <a:t> at the science fair!</a:t>
+              <a:t> at the school art show.</a:t>
             </a:r>
             <a:endParaRPr lang="en-US" sz="1800" dirty="0"/>
           </a:p>
@@ -6716,7 +6716,7 @@
                 <a:ea typeface="Calibri" pitchFamily="34" charset="-122"/>
                 <a:cs typeface="Calibri" pitchFamily="34" charset="-120"/>
               </a:rPr>
-              <a:t>Word Labs  •  wordlabs.app  •  Root: 'create' = to make or bring forth</a:t>
+              <a:t>Word Labs  •  wordlabs.app  •  Root: 'create' = make or bring into existence</a:t>
             </a:r>
             <a:endParaRPr lang="en-US" sz="800" dirty="0"/>
           </a:p>
@@ -7543,7 +7543,7 @@
                 <a:ea typeface="Calibri" pitchFamily="34" charset="-122"/>
                 <a:cs typeface="Calibri" pitchFamily="34" charset="-120"/>
               </a:rPr>
-              <a:t>Word Labs  •  wordlabs.app  •  Root: 'create' = to make or bring forth</a:t>
+              <a:t>Word Labs  •  wordlabs.app  •  Root: 'create' = make or bring into existence</a:t>
             </a:r>
             <a:endParaRPr lang="en-US" sz="800" dirty="0"/>
           </a:p>
@@ -7860,7 +7860,7 @@
                 <a:ea typeface="Calibri" pitchFamily="34" charset="-122"/>
                 <a:cs typeface="Calibri" pitchFamily="34" charset="-120"/>
               </a:rPr>
-              <a:t>to make or bring forth</a:t>
+              <a:t>to make or bring into existence</a:t>
             </a:r>
             <a:endParaRPr lang="en-US" sz="850" dirty="0"/>
           </a:p>
@@ -8567,7 +8567,7 @@
                 <a:ea typeface="Calibri" pitchFamily="34" charset="-122"/>
                 <a:cs typeface="Calibri" pitchFamily="34" charset="-120"/>
               </a:rPr>
-              <a:t>Word Labs  •  wordlabs.app  •  Root: 'create' = to make or bring forth</a:t>
+              <a:t>Word Labs  •  wordlabs.app  •  Root: 'create' = make or bring into existence</a:t>
             </a:r>
             <a:endParaRPr lang="en-US" sz="800" dirty="0"/>
           </a:p>
@@ -8884,7 +8884,7 @@
                 <a:ea typeface="Calibri" pitchFamily="34" charset="-122"/>
                 <a:cs typeface="Calibri" pitchFamily="34" charset="-120"/>
               </a:rPr>
-              <a:t>to make or bring forth</a:t>
+              <a:t>to make or bring into existence</a:t>
             </a:r>
             <a:endParaRPr lang="en-US" sz="850" dirty="0"/>
           </a:p>
@@ -9828,7 +9828,7 @@
                 <a:ea typeface="Calibri" pitchFamily="34" charset="-122"/>
                 <a:cs typeface="Calibri" pitchFamily="34" charset="-120"/>
               </a:rPr>
-              <a:t>Word Labs  •  wordlabs.app  •  Root: 'create' = to make or bring forth</a:t>
+              <a:t>Word Labs  •  wordlabs.app  •  Root: 'create' = make or bring into existence</a:t>
             </a:r>
             <a:endParaRPr lang="en-US" sz="800" dirty="0"/>
           </a:p>
@@ -10145,7 +10145,7 @@
                 <a:ea typeface="Calibri" pitchFamily="34" charset="-122"/>
                 <a:cs typeface="Calibri" pitchFamily="34" charset="-120"/>
               </a:rPr>
-              <a:t>to make or bring forth</a:t>
+              <a:t>to make or bring into existence</a:t>
             </a:r>
             <a:endParaRPr lang="en-US" sz="850" dirty="0"/>
           </a:p>
@@ -10772,7 +10772,7 @@
         </p:nvSpPr>
         <p:spPr>
           <a:xfrm>
-            <a:off x="2427732" y="4169664"/>
+            <a:off x="2254649" y="4169664"/>
             <a:ext cx="685800" cy="475488"/>
           </a:xfrm>
           <a:prstGeom prst="rect">
@@ -10799,7 +10799,7 @@
         </p:nvSpPr>
         <p:spPr>
           <a:xfrm>
-            <a:off x="2427732" y="4169664"/>
+            <a:off x="2254649" y="4169664"/>
             <a:ext cx="685800" cy="475488"/>
           </a:xfrm>
           <a:prstGeom prst="rect">
@@ -10838,7 +10838,7 @@
         </p:nvSpPr>
         <p:spPr>
           <a:xfrm>
-            <a:off x="3639312" y="4169664"/>
+            <a:off x="3293146" y="4169664"/>
             <a:ext cx="685800" cy="475488"/>
           </a:xfrm>
           <a:prstGeom prst="rect">
@@ -10865,7 +10865,7 @@
         </p:nvSpPr>
         <p:spPr>
           <a:xfrm>
-            <a:off x="3639312" y="4169664"/>
+            <a:off x="3293146" y="4169664"/>
             <a:ext cx="685800" cy="475488"/>
           </a:xfrm>
           <a:prstGeom prst="rect">
@@ -10904,7 +10904,7 @@
         </p:nvSpPr>
         <p:spPr>
           <a:xfrm>
-            <a:off x="4850892" y="4169664"/>
+            <a:off x="4331643" y="4169664"/>
             <a:ext cx="685800" cy="475488"/>
           </a:xfrm>
           <a:prstGeom prst="rect">
@@ -10931,7 +10931,7 @@
         </p:nvSpPr>
         <p:spPr>
           <a:xfrm>
-            <a:off x="4850892" y="4169664"/>
+            <a:off x="4331643" y="4169664"/>
             <a:ext cx="685800" cy="475488"/>
           </a:xfrm>
           <a:prstGeom prst="rect">
@@ -10970,7 +10970,7 @@
         </p:nvSpPr>
         <p:spPr>
           <a:xfrm>
-            <a:off x="6062472" y="4169664"/>
+            <a:off x="5370141" y="4169664"/>
             <a:ext cx="685800" cy="475488"/>
           </a:xfrm>
           <a:prstGeom prst="rect">
@@ -10997,7 +10997,7 @@
         </p:nvSpPr>
         <p:spPr>
           <a:xfrm>
-            <a:off x="6062472" y="4169664"/>
+            <a:off x="5370141" y="4169664"/>
             <a:ext cx="685800" cy="475488"/>
           </a:xfrm>
           <a:prstGeom prst="rect">
@@ -11036,7 +11036,7 @@
         </p:nvSpPr>
         <p:spPr>
           <a:xfrm>
-            <a:off x="7274052" y="4169664"/>
+            <a:off x="6408638" y="4169664"/>
             <a:ext cx="685800" cy="475488"/>
           </a:xfrm>
           <a:prstGeom prst="rect">
@@ -11063,7 +11063,7 @@
         </p:nvSpPr>
         <p:spPr>
           <a:xfrm>
-            <a:off x="7274052" y="4169664"/>
+            <a:off x="6408638" y="4169664"/>
             <a:ext cx="685800" cy="475488"/>
           </a:xfrm>
           <a:prstGeom prst="rect">
@@ -11088,7 +11088,73 @@
                 <a:ea typeface="Trebuchet MS" pitchFamily="34" charset="-122"/>
                 <a:cs typeface="Trebuchet MS" pitchFamily="34" charset="-120"/>
               </a:rPr>
-              <a:t>ive</a:t>
+              <a:t>i</a:t>
+            </a:r>
+            <a:endParaRPr lang="en-US" sz="900" dirty="0"/>
+          </a:p>
+        </p:txBody>
+      </p:sp>
+      <p:sp>
+        <p:nvSpPr>
+          <p:cNvPr id="47" name="Shape 45"/>
+          <p:cNvSpPr/>
+          <p:nvPr/>
+        </p:nvSpPr>
+        <p:spPr>
+          <a:xfrm>
+            <a:off x="7447135" y="4169664"/>
+            <a:ext cx="685800" cy="475488"/>
+          </a:xfrm>
+          <a:prstGeom prst="rect">
+            <a:avLst>
+              <a:gd name="adj" fmla="val 7692"/>
+            </a:avLst>
+          </a:prstGeom>
+          <a:solidFill>
+            <a:srgbClr val="FFFFFF"/>
+          </a:solidFill>
+          <a:ln w="12700">
+            <a:solidFill>
+              <a:srgbClr val="DB2777"/>
+            </a:solidFill>
+            <a:prstDash val="solid"/>
+          </a:ln>
+        </p:spPr>
+      </p:sp>
+      <p:sp>
+        <p:nvSpPr>
+          <p:cNvPr id="48" name="Text 46"/>
+          <p:cNvSpPr/>
+          <p:nvPr/>
+        </p:nvSpPr>
+        <p:spPr>
+          <a:xfrm>
+            <a:off x="7447135" y="4169664"/>
+            <a:ext cx="685800" cy="475488"/>
+          </a:xfrm>
+          <a:prstGeom prst="rect">
+            <a:avLst/>
+          </a:prstGeom>
+          <a:noFill/>
+          <a:ln/>
+        </p:spPr>
+        <p:txBody>
+          <a:bodyPr wrap="square" lIns="0" tIns="0" rIns="0" bIns="0" rtlCol="0" anchor="ctr"/>
+          <a:lstStyle/>
+          <a:p>
+            <a:pPr algn="ctr" indent="0" marL="0">
+              <a:buNone/>
+            </a:pPr>
+            <a:r>
+              <a:rPr lang="en-US" sz="900" b="1" dirty="0">
+                <a:solidFill>
+                  <a:srgbClr val="9D174D"/>
+                </a:solidFill>
+                <a:latin typeface="Trebuchet MS" pitchFamily="34" charset="0"/>
+                <a:ea typeface="Trebuchet MS" pitchFamily="34" charset="-122"/>
+                <a:cs typeface="Trebuchet MS" pitchFamily="34" charset="-120"/>
+              </a:rPr>
+              <a:t>ve</a:t>
             </a:r>
             <a:endParaRPr lang="en-US" sz="900" dirty="0"/>
           </a:p>
@@ -11380,7 +11446,7 @@
                 <a:ea typeface="Calibri" pitchFamily="34" charset="-122"/>
                 <a:cs typeface="Calibri" pitchFamily="34" charset="-120"/>
               </a:rPr>
-              <a:t>Word Labs  •  wordlabs.app  •  Root: 'create' = to make or bring forth</a:t>
+              <a:t>Word Labs  •  wordlabs.app  •  Root: 'create' = make or bring into existence</a:t>
             </a:r>
             <a:endParaRPr lang="en-US" sz="800" dirty="0"/>
           </a:p>
@@ -12207,7 +12273,7 @@
                 <a:ea typeface="Calibri" pitchFamily="34" charset="-122"/>
                 <a:cs typeface="Calibri" pitchFamily="34" charset="-120"/>
               </a:rPr>
-              <a:t>Word Labs  •  wordlabs.app  •  Root: 'create' = to make or bring forth</a:t>
+              <a:t>Word Labs  •  wordlabs.app  •  Root: 'create' = make or bring into existence</a:t>
             </a:r>
             <a:endParaRPr lang="en-US" sz="800" dirty="0"/>
           </a:p>
@@ -12524,7 +12590,7 @@
                 <a:ea typeface="Calibri" pitchFamily="34" charset="-122"/>
                 <a:cs typeface="Calibri" pitchFamily="34" charset="-120"/>
               </a:rPr>
-              <a:t>to make or bring forth</a:t>
+              <a:t>to make or bring into existence</a:t>
             </a:r>
             <a:endParaRPr lang="en-US" sz="850" dirty="0"/>
           </a:p>
@@ -12675,7 +12741,7 @@
                 <a:ea typeface="Calibri" pitchFamily="34" charset="-122"/>
                 <a:cs typeface="Calibri" pitchFamily="34" charset="-120"/>
               </a:rPr>
-              <a:t>the act or result of</a:t>
+              <a:t>act or result of</a:t>
             </a:r>
             <a:endParaRPr lang="en-US" sz="850" dirty="0"/>
           </a:p>
@@ -13231,7 +13297,7 @@
                 <a:ea typeface="Calibri" pitchFamily="34" charset="-122"/>
                 <a:cs typeface="Calibri" pitchFamily="34" charset="-120"/>
               </a:rPr>
-              <a:t>Word Labs  •  wordlabs.app  •  Root: 'create' = to make or bring forth</a:t>
+              <a:t>Word Labs  •  wordlabs.app  •  Root: 'create' = make or bring into existence</a:t>
             </a:r>
             <a:endParaRPr lang="en-US" sz="800" dirty="0"/>
           </a:p>
@@ -13548,7 +13614,7 @@
                 <a:ea typeface="Calibri" pitchFamily="34" charset="-122"/>
                 <a:cs typeface="Calibri" pitchFamily="34" charset="-120"/>
               </a:rPr>
-              <a:t>to make or bring forth</a:t>
+              <a:t>to make or bring into existence</a:t>
             </a:r>
             <a:endParaRPr lang="en-US" sz="850" dirty="0"/>
           </a:p>
@@ -13699,7 +13765,7 @@
                 <a:ea typeface="Calibri" pitchFamily="34" charset="-122"/>
                 <a:cs typeface="Calibri" pitchFamily="34" charset="-120"/>
               </a:rPr>
-              <a:t>the act or result of</a:t>
+              <a:t>act or result of</a:t>
             </a:r>
             <a:endParaRPr lang="en-US" sz="850" dirty="0"/>
           </a:p>
@@ -14401,7 +14467,7 @@
                 <a:ea typeface="Calibri" pitchFamily="34" charset="-122"/>
                 <a:cs typeface="Calibri" pitchFamily="34" charset="-120"/>
               </a:rPr>
-              <a:t>Root 'create' — to make or bring forth</a:t>
+              <a:t>Root 'create' — make or bring into existence</a:t>
             </a:r>
             <a:endParaRPr lang="en-US" sz="1600" dirty="0"/>
           </a:p>
@@ -14757,7 +14823,7 @@
                 <a:ea typeface="Calibri" pitchFamily="34" charset="-122"/>
                 <a:cs typeface="Calibri" pitchFamily="34" charset="-120"/>
               </a:rPr>
-              <a:t>Word Labs  •  wordlabs.app  •  Root: 'create' = to make or bring forth</a:t>
+              <a:t>Word Labs  •  wordlabs.app  •  Root: 'create' = make or bring into existence</a:t>
             </a:r>
             <a:endParaRPr lang="en-US" sz="800" dirty="0"/>
           </a:p>
@@ -15074,7 +15140,7 @@
                 <a:ea typeface="Calibri" pitchFamily="34" charset="-122"/>
                 <a:cs typeface="Calibri" pitchFamily="34" charset="-120"/>
               </a:rPr>
-              <a:t>to make or bring forth</a:t>
+              <a:t>to make or bring into existence</a:t>
             </a:r>
             <a:endParaRPr lang="en-US" sz="850" dirty="0"/>
           </a:p>
@@ -15225,7 +15291,7 @@
                 <a:ea typeface="Calibri" pitchFamily="34" charset="-122"/>
                 <a:cs typeface="Calibri" pitchFamily="34" charset="-120"/>
               </a:rPr>
-              <a:t>the act or result of</a:t>
+              <a:t>act or result of</a:t>
             </a:r>
             <a:endParaRPr lang="en-US" sz="850" dirty="0"/>
           </a:p>
@@ -15701,7 +15767,7 @@
         </p:nvSpPr>
         <p:spPr>
           <a:xfrm>
-            <a:off x="2254649" y="4169664"/>
+            <a:off x="2427732" y="4169664"/>
             <a:ext cx="685800" cy="384048"/>
           </a:xfrm>
           <a:prstGeom prst="rect">
@@ -15728,7 +15794,7 @@
         </p:nvSpPr>
         <p:spPr>
           <a:xfrm>
-            <a:off x="2254649" y="4169664"/>
+            <a:off x="2427732" y="4169664"/>
             <a:ext cx="685800" cy="384048"/>
           </a:xfrm>
           <a:prstGeom prst="rect">
@@ -15767,7 +15833,7 @@
         </p:nvSpPr>
         <p:spPr>
           <a:xfrm>
-            <a:off x="3293146" y="4169664"/>
+            <a:off x="3639312" y="4169664"/>
             <a:ext cx="685800" cy="384048"/>
           </a:xfrm>
           <a:prstGeom prst="rect">
@@ -15794,7 +15860,7 @@
         </p:nvSpPr>
         <p:spPr>
           <a:xfrm>
-            <a:off x="3293146" y="4169664"/>
+            <a:off x="3639312" y="4169664"/>
             <a:ext cx="685800" cy="384048"/>
           </a:xfrm>
           <a:prstGeom prst="rect">
@@ -15833,7 +15899,7 @@
         </p:nvSpPr>
         <p:spPr>
           <a:xfrm>
-            <a:off x="4331643" y="4169664"/>
+            <a:off x="4850892" y="4169664"/>
             <a:ext cx="685800" cy="384048"/>
           </a:xfrm>
           <a:prstGeom prst="rect">
@@ -15860,7 +15926,7 @@
         </p:nvSpPr>
         <p:spPr>
           <a:xfrm>
-            <a:off x="4331643" y="4169664"/>
+            <a:off x="4850892" y="4169664"/>
             <a:ext cx="685800" cy="384048"/>
           </a:xfrm>
           <a:prstGeom prst="rect">
@@ -15899,7 +15965,7 @@
         </p:nvSpPr>
         <p:spPr>
           <a:xfrm>
-            <a:off x="5370141" y="4169664"/>
+            <a:off x="6062472" y="4169664"/>
             <a:ext cx="685800" cy="384048"/>
           </a:xfrm>
           <a:prstGeom prst="rect">
@@ -15926,7 +15992,7 @@
         </p:nvSpPr>
         <p:spPr>
           <a:xfrm>
-            <a:off x="5370141" y="4169664"/>
+            <a:off x="6062472" y="4169664"/>
             <a:ext cx="685800" cy="384048"/>
           </a:xfrm>
           <a:prstGeom prst="rect">
@@ -15965,7 +16031,7 @@
         </p:nvSpPr>
         <p:spPr>
           <a:xfrm>
-            <a:off x="6408638" y="4169664"/>
+            <a:off x="7274052" y="4169664"/>
             <a:ext cx="685800" cy="384048"/>
           </a:xfrm>
           <a:prstGeom prst="rect">
@@ -15992,7 +16058,7 @@
         </p:nvSpPr>
         <p:spPr>
           <a:xfrm>
-            <a:off x="6408638" y="4169664"/>
+            <a:off x="7274052" y="4169664"/>
             <a:ext cx="685800" cy="384048"/>
           </a:xfrm>
           <a:prstGeom prst="rect">
@@ -16017,7 +16083,7 @@
                 <a:ea typeface="Trebuchet MS" pitchFamily="34" charset="-122"/>
                 <a:cs typeface="Trebuchet MS" pitchFamily="34" charset="-120"/>
               </a:rPr>
-              <a:t>io</a:t>
+              <a:t>ion</a:t>
             </a:r>
             <a:endParaRPr lang="en-US" sz="900" dirty="0"/>
           </a:p>
@@ -16031,7 +16097,7 @@
         </p:nvSpPr>
         <p:spPr>
           <a:xfrm>
-            <a:off x="6408638" y="4572000"/>
+            <a:off x="7274052" y="4572000"/>
             <a:ext cx="685800" cy="219456"/>
           </a:xfrm>
           <a:prstGeom prst="rect">
@@ -16056,75 +16122,9 @@
                 <a:ea typeface="Calibri" pitchFamily="34" charset="-122"/>
                 <a:cs typeface="Calibri" pitchFamily="34" charset="-120"/>
               </a:rPr>
-              <a:t>/sh/</a:t>
+              <a:t>/shun/</a:t>
             </a:r>
             <a:endParaRPr lang="en-US" sz="750" dirty="0"/>
-          </a:p>
-        </p:txBody>
-      </p:sp>
-      <p:sp>
-        <p:nvSpPr>
-          <p:cNvPr id="48" name="Shape 46"/>
-          <p:cNvSpPr/>
-          <p:nvPr/>
-        </p:nvSpPr>
-        <p:spPr>
-          <a:xfrm>
-            <a:off x="7447135" y="4169664"/>
-            <a:ext cx="685800" cy="384048"/>
-          </a:xfrm>
-          <a:prstGeom prst="rect">
-            <a:avLst>
-              <a:gd name="adj" fmla="val 9524"/>
-            </a:avLst>
-          </a:prstGeom>
-          <a:solidFill>
-            <a:srgbClr val="FFFFFF"/>
-          </a:solidFill>
-          <a:ln w="12700">
-            <a:solidFill>
-              <a:srgbClr val="DB2777"/>
-            </a:solidFill>
-            <a:prstDash val="solid"/>
-          </a:ln>
-        </p:spPr>
-      </p:sp>
-      <p:sp>
-        <p:nvSpPr>
-          <p:cNvPr id="49" name="Text 47"/>
-          <p:cNvSpPr/>
-          <p:nvPr/>
-        </p:nvSpPr>
-        <p:spPr>
-          <a:xfrm>
-            <a:off x="7447135" y="4169664"/>
-            <a:ext cx="685800" cy="384048"/>
-          </a:xfrm>
-          <a:prstGeom prst="rect">
-            <a:avLst/>
-          </a:prstGeom>
-          <a:noFill/>
-          <a:ln/>
-        </p:spPr>
-        <p:txBody>
-          <a:bodyPr wrap="square" lIns="0" tIns="0" rIns="0" bIns="0" rtlCol="0" anchor="ctr"/>
-          <a:lstStyle/>
-          <a:p>
-            <a:pPr algn="ctr" indent="0" marL="0">
-              <a:buNone/>
-            </a:pPr>
-            <a:r>
-              <a:rPr lang="en-US" sz="900" b="1" dirty="0">
-                <a:solidFill>
-                  <a:srgbClr val="9D174D"/>
-                </a:solidFill>
-                <a:latin typeface="Trebuchet MS" pitchFamily="34" charset="0"/>
-                <a:ea typeface="Trebuchet MS" pitchFamily="34" charset="-122"/>
-                <a:cs typeface="Trebuchet MS" pitchFamily="34" charset="-120"/>
-              </a:rPr>
-              <a:t>n</a:t>
-            </a:r>
-            <a:endParaRPr lang="en-US" sz="900" dirty="0"/>
           </a:p>
         </p:txBody>
       </p:sp>
@@ -16696,7 +16696,7 @@
                 <a:ea typeface="Calibri" pitchFamily="34" charset="-122"/>
                 <a:cs typeface="Calibri" pitchFamily="34" charset="-120"/>
               </a:rPr>
-              <a:t>Word Labs  •  wordlabs.app  •  Root: 'create' = to make or bring forth</a:t>
+              <a:t>Word Labs  •  wordlabs.app  •  Root: 'create' = make or bring into existence</a:t>
             </a:r>
             <a:endParaRPr lang="en-US" sz="800" dirty="0"/>
           </a:p>
@@ -17030,7 +17030,7 @@
                 <a:ea typeface="Trebuchet MS" pitchFamily="34" charset="-122"/>
                 <a:cs typeface="Trebuchet MS" pitchFamily="34" charset="-120"/>
               </a:rPr>
-              <a:t>2</a:t>
+              <a:t>1</a:t>
             </a:r>
             <a:pPr algn="ctr" indent="0" marL="0">
               <a:buNone/>
@@ -17044,7 +17044,7 @@
                 <a:ea typeface="Trebuchet MS" pitchFamily="34" charset="-122"/>
                 <a:cs typeface="Trebuchet MS" pitchFamily="34" charset="-120"/>
               </a:rPr>
-              <a:t>  punctuation marks</a:t>
+              <a:t>  punctuation mark</a:t>
             </a:r>
             <a:endParaRPr lang="en-US" sz="2800" dirty="0"/>
           </a:p>
@@ -17336,7 +17336,7 @@
                 <a:ea typeface="Calibri" pitchFamily="34" charset="-122"/>
                 <a:cs typeface="Calibri" pitchFamily="34" charset="-120"/>
               </a:rPr>
-              <a:t>Word Labs  •  wordlabs.app  •  Root: 'create' = to make or bring forth</a:t>
+              <a:t>Word Labs  •  wordlabs.app  •  Root: 'create' = make or bring into existence</a:t>
             </a:r>
             <a:endParaRPr lang="en-US" sz="800" dirty="0"/>
           </a:p>
@@ -17479,7 +17479,7 @@
                 <a:ea typeface="Calibri" pitchFamily="34" charset="-122"/>
                 <a:cs typeface="Calibri" pitchFamily="34" charset="-120"/>
               </a:rPr>
-              <a:t> explained how </a:t>
+              <a:t> spent weeks on her </a:t>
             </a:r>
             <a:pPr algn="l" indent="0" marL="0">
               <a:buNone/>
@@ -17510,7 +17510,7 @@
                 <a:ea typeface="Calibri" pitchFamily="34" charset="-122"/>
                 <a:cs typeface="Calibri" pitchFamily="34" charset="-120"/>
               </a:rPr>
-              <a:t> and </a:t>
+              <a:t> of the famous painting, showing incredible </a:t>
             </a:r>
             <a:pPr algn="l" indent="0" marL="0">
               <a:buNone/>
@@ -17541,7 +17541,7 @@
                 <a:ea typeface="Calibri" pitchFamily="34" charset="-122"/>
                 <a:cs typeface="Calibri" pitchFamily="34" charset="-120"/>
               </a:rPr>
-              <a:t> helped her design the sculpture.</a:t>
+              <a:t>.</a:t>
             </a:r>
             <a:endParaRPr lang="en-US" sz="1800" dirty="0"/>
           </a:p>
@@ -18283,7 +18283,7 @@
                 <a:ea typeface="Calibri" pitchFamily="34" charset="-122"/>
                 <a:cs typeface="Calibri" pitchFamily="34" charset="-120"/>
               </a:rPr>
-              <a:t>Word Labs  •  wordlabs.app  •  Root: 'create' = to make or bring forth</a:t>
+              <a:t>Word Labs  •  wordlabs.app  •  Root: 'create' = make or bring into existence</a:t>
             </a:r>
             <a:endParaRPr lang="en-US" sz="800" dirty="0"/>
           </a:p>
@@ -19110,7 +19110,7 @@
                 <a:ea typeface="Calibri" pitchFamily="34" charset="-122"/>
                 <a:cs typeface="Calibri" pitchFamily="34" charset="-120"/>
               </a:rPr>
-              <a:t>Word Labs  •  wordlabs.app  •  Root: 'create' = to make or bring forth</a:t>
+              <a:t>Word Labs  •  wordlabs.app  •  Root: 'create' = make or bring into existence</a:t>
             </a:r>
             <a:endParaRPr lang="en-US" sz="800" dirty="0"/>
           </a:p>
@@ -19427,7 +19427,7 @@
                 <a:ea typeface="Calibri" pitchFamily="34" charset="-122"/>
                 <a:cs typeface="Calibri" pitchFamily="34" charset="-120"/>
               </a:rPr>
-              <a:t>to make or bring forth</a:t>
+              <a:t>to make or bring into existence</a:t>
             </a:r>
             <a:endParaRPr lang="en-US" sz="850" dirty="0"/>
           </a:p>
@@ -20134,7 +20134,7 @@
                 <a:ea typeface="Calibri" pitchFamily="34" charset="-122"/>
                 <a:cs typeface="Calibri" pitchFamily="34" charset="-120"/>
               </a:rPr>
-              <a:t>Word Labs  •  wordlabs.app  •  Root: 'create' = to make or bring forth</a:t>
+              <a:t>Word Labs  •  wordlabs.app  •  Root: 'create' = make or bring into existence</a:t>
             </a:r>
             <a:endParaRPr lang="en-US" sz="800" dirty="0"/>
           </a:p>
@@ -20451,7 +20451,7 @@
                 <a:ea typeface="Calibri" pitchFamily="34" charset="-122"/>
                 <a:cs typeface="Calibri" pitchFamily="34" charset="-120"/>
               </a:rPr>
-              <a:t>to make or bring forth</a:t>
+              <a:t>to make or bring into existence</a:t>
             </a:r>
             <a:endParaRPr lang="en-US" sz="850" dirty="0"/>
           </a:p>
@@ -21395,7 +21395,7 @@
                 <a:ea typeface="Calibri" pitchFamily="34" charset="-122"/>
                 <a:cs typeface="Calibri" pitchFamily="34" charset="-120"/>
               </a:rPr>
-              <a:t>Word Labs  •  wordlabs.app  •  Root: 'create' = to make or bring forth</a:t>
+              <a:t>Word Labs  •  wordlabs.app  •  Root: 'create' = make or bring into existence</a:t>
             </a:r>
             <a:endParaRPr lang="en-US" sz="800" dirty="0"/>
           </a:p>
@@ -21712,7 +21712,7 @@
                 <a:ea typeface="Calibri" pitchFamily="34" charset="-122"/>
                 <a:cs typeface="Calibri" pitchFamily="34" charset="-120"/>
               </a:rPr>
-              <a:t>to make or bring forth</a:t>
+              <a:t>to make or bring into existence</a:t>
             </a:r>
             <a:endParaRPr lang="en-US" sz="850" dirty="0"/>
           </a:p>
@@ -22947,7 +22947,7 @@
                 <a:ea typeface="Calibri" pitchFamily="34" charset="-122"/>
                 <a:cs typeface="Calibri" pitchFamily="34" charset="-120"/>
               </a:rPr>
-              <a:t>Word Labs  •  wordlabs.app  •  Root: 'create' = to make or bring forth</a:t>
+              <a:t>Word Labs  •  wordlabs.app  •  Root: 'create' = make or bring into existence</a:t>
             </a:r>
             <a:endParaRPr lang="en-US" sz="800" dirty="0"/>
           </a:p>
@@ -23774,7 +23774,7 @@
                 <a:ea typeface="Calibri" pitchFamily="34" charset="-122"/>
                 <a:cs typeface="Calibri" pitchFamily="34" charset="-120"/>
               </a:rPr>
-              <a:t>Word Labs  •  wordlabs.app  •  Root: 'create' = to make or bring forth</a:t>
+              <a:t>Word Labs  •  wordlabs.app  •  Root: 'create' = make or bring into existence</a:t>
             </a:r>
             <a:endParaRPr lang="en-US" sz="800" dirty="0"/>
           </a:p>
@@ -24203,7 +24203,7 @@
                 <a:ea typeface="Calibri" pitchFamily="34" charset="-122"/>
                 <a:cs typeface="Calibri" pitchFamily="34" charset="-120"/>
               </a:rPr>
-              <a:t>to make or bring forth</a:t>
+              <a:t>to make or bring into existence</a:t>
             </a:r>
             <a:endParaRPr lang="en-US" sz="850" dirty="0"/>
           </a:p>
@@ -24354,7 +24354,7 @@
                 <a:ea typeface="Calibri" pitchFamily="34" charset="-122"/>
                 <a:cs typeface="Calibri" pitchFamily="34" charset="-120"/>
               </a:rPr>
-              <a:t>the act or result of</a:t>
+              <a:t>act or result of</a:t>
             </a:r>
             <a:endParaRPr lang="en-US" sz="850" dirty="0"/>
           </a:p>
@@ -24910,7 +24910,7 @@
                 <a:ea typeface="Calibri" pitchFamily="34" charset="-122"/>
                 <a:cs typeface="Calibri" pitchFamily="34" charset="-120"/>
               </a:rPr>
-              <a:t>Word Labs  •  wordlabs.app  •  Root: 'create' = to make or bring forth</a:t>
+              <a:t>Word Labs  •  wordlabs.app  •  Root: 'create' = make or bring into existence</a:t>
             </a:r>
             <a:endParaRPr lang="en-US" sz="800" dirty="0"/>
           </a:p>
@@ -24983,7 +24983,7 @@
                 <a:ea typeface="Trebuchet MS" pitchFamily="34" charset="-122"/>
                 <a:cs typeface="Trebuchet MS" pitchFamily="34" charset="-120"/>
               </a:rPr>
-              <a:t>We are learning that the root 'create' means 'to make or bring forth'.</a:t>
+              <a:t>We are learning that the root 'create' means 'make or bring into existence'.</a:t>
             </a:r>
             <a:endParaRPr lang="en-US" sz="2000" dirty="0"/>
           </a:p>
@@ -25629,7 +25629,7 @@
                 <a:ea typeface="Calibri" pitchFamily="34" charset="-122"/>
                 <a:cs typeface="Calibri" pitchFamily="34" charset="-120"/>
               </a:rPr>
-              <a:t>Word Labs  •  wordlabs.app  •  Root: 'create' = to make or bring forth</a:t>
+              <a:t>Word Labs  •  wordlabs.app  •  Root: 'create' = make or bring into existence</a:t>
             </a:r>
             <a:endParaRPr lang="en-US" sz="800" dirty="0"/>
           </a:p>
@@ -26058,7 +26058,7 @@
                 <a:ea typeface="Calibri" pitchFamily="34" charset="-122"/>
                 <a:cs typeface="Calibri" pitchFamily="34" charset="-120"/>
               </a:rPr>
-              <a:t>to make or bring forth</a:t>
+              <a:t>to make or bring into existence</a:t>
             </a:r>
             <a:endParaRPr lang="en-US" sz="850" dirty="0"/>
           </a:p>
@@ -26209,7 +26209,7 @@
                 <a:ea typeface="Calibri" pitchFamily="34" charset="-122"/>
                 <a:cs typeface="Calibri" pitchFamily="34" charset="-120"/>
               </a:rPr>
-              <a:t>the act or result of</a:t>
+              <a:t>act or result of</a:t>
             </a:r>
             <a:endParaRPr lang="en-US" sz="850" dirty="0"/>
           </a:p>
@@ -27107,7 +27107,7 @@
                 <a:ea typeface="Calibri" pitchFamily="34" charset="-122"/>
                 <a:cs typeface="Calibri" pitchFamily="34" charset="-120"/>
               </a:rPr>
-              <a:t>Word Labs  •  wordlabs.app  •  Root: 'create' = to make or bring forth</a:t>
+              <a:t>Word Labs  •  wordlabs.app  •  Root: 'create' = make or bring into existence</a:t>
             </a:r>
             <a:endParaRPr lang="en-US" sz="800" dirty="0"/>
           </a:p>
@@ -27536,7 +27536,7 @@
                 <a:ea typeface="Calibri" pitchFamily="34" charset="-122"/>
                 <a:cs typeface="Calibri" pitchFamily="34" charset="-120"/>
               </a:rPr>
-              <a:t>to make or bring forth</a:t>
+              <a:t>to make or bring into existence</a:t>
             </a:r>
             <a:endParaRPr lang="en-US" sz="850" dirty="0"/>
           </a:p>
@@ -27687,7 +27687,7 @@
                 <a:ea typeface="Calibri" pitchFamily="34" charset="-122"/>
                 <a:cs typeface="Calibri" pitchFamily="34" charset="-120"/>
               </a:rPr>
-              <a:t>the act or result of</a:t>
+              <a:t>act or result of</a:t>
             </a:r>
             <a:endParaRPr lang="en-US" sz="850" dirty="0"/>
           </a:p>
@@ -28268,7 +28268,7 @@
         </p:nvSpPr>
         <p:spPr>
           <a:xfrm>
-            <a:off x="2023872" y="4169664"/>
+            <a:off x="2124837" y="4169664"/>
             <a:ext cx="685800" cy="384048"/>
           </a:xfrm>
           <a:prstGeom prst="rect">
@@ -28295,7 +28295,7 @@
         </p:nvSpPr>
         <p:spPr>
           <a:xfrm>
-            <a:off x="2023872" y="4169664"/>
+            <a:off x="2124837" y="4169664"/>
             <a:ext cx="685800" cy="384048"/>
           </a:xfrm>
           <a:prstGeom prst="rect">
@@ -28334,7 +28334,7 @@
         </p:nvSpPr>
         <p:spPr>
           <a:xfrm>
-            <a:off x="2831592" y="4169664"/>
+            <a:off x="3033522" y="4169664"/>
             <a:ext cx="685800" cy="384048"/>
           </a:xfrm>
           <a:prstGeom prst="rect">
@@ -28361,7 +28361,7 @@
         </p:nvSpPr>
         <p:spPr>
           <a:xfrm>
-            <a:off x="2831592" y="4169664"/>
+            <a:off x="3033522" y="4169664"/>
             <a:ext cx="685800" cy="384048"/>
           </a:xfrm>
           <a:prstGeom prst="rect">
@@ -28400,7 +28400,7 @@
         </p:nvSpPr>
         <p:spPr>
           <a:xfrm>
-            <a:off x="3639312" y="4169664"/>
+            <a:off x="3942207" y="4169664"/>
             <a:ext cx="685800" cy="384048"/>
           </a:xfrm>
           <a:prstGeom prst="rect">
@@ -28427,7 +28427,7 @@
         </p:nvSpPr>
         <p:spPr>
           <a:xfrm>
-            <a:off x="3639312" y="4169664"/>
+            <a:off x="3942207" y="4169664"/>
             <a:ext cx="685800" cy="384048"/>
           </a:xfrm>
           <a:prstGeom prst="rect">
@@ -28466,7 +28466,7 @@
         </p:nvSpPr>
         <p:spPr>
           <a:xfrm>
-            <a:off x="4447032" y="4169664"/>
+            <a:off x="4850892" y="4169664"/>
             <a:ext cx="685800" cy="384048"/>
           </a:xfrm>
           <a:prstGeom prst="rect">
@@ -28493,7 +28493,7 @@
         </p:nvSpPr>
         <p:spPr>
           <a:xfrm>
-            <a:off x="4447032" y="4169664"/>
+            <a:off x="4850892" y="4169664"/>
             <a:ext cx="685800" cy="384048"/>
           </a:xfrm>
           <a:prstGeom prst="rect">
@@ -28532,7 +28532,7 @@
         </p:nvSpPr>
         <p:spPr>
           <a:xfrm>
-            <a:off x="5254752" y="4169664"/>
+            <a:off x="5759577" y="4169664"/>
             <a:ext cx="685800" cy="384048"/>
           </a:xfrm>
           <a:prstGeom prst="rect">
@@ -28559,7 +28559,7 @@
         </p:nvSpPr>
         <p:spPr>
           <a:xfrm>
-            <a:off x="5254752" y="4169664"/>
+            <a:off x="5759577" y="4169664"/>
             <a:ext cx="685800" cy="384048"/>
           </a:xfrm>
           <a:prstGeom prst="rect">
@@ -28598,7 +28598,7 @@
         </p:nvSpPr>
         <p:spPr>
           <a:xfrm>
-            <a:off x="6062472" y="4169664"/>
+            <a:off x="6668262" y="4169664"/>
             <a:ext cx="685800" cy="384048"/>
           </a:xfrm>
           <a:prstGeom prst="rect">
@@ -28625,7 +28625,7 @@
         </p:nvSpPr>
         <p:spPr>
           <a:xfrm>
-            <a:off x="6062472" y="4169664"/>
+            <a:off x="6668262" y="4169664"/>
             <a:ext cx="685800" cy="384048"/>
           </a:xfrm>
           <a:prstGeom prst="rect">
@@ -28664,7 +28664,7 @@
         </p:nvSpPr>
         <p:spPr>
           <a:xfrm>
-            <a:off x="6870192" y="4169664"/>
+            <a:off x="7576947" y="4169664"/>
             <a:ext cx="685800" cy="384048"/>
           </a:xfrm>
           <a:prstGeom prst="rect">
@@ -28691,7 +28691,7 @@
         </p:nvSpPr>
         <p:spPr>
           <a:xfrm>
-            <a:off x="6870192" y="4169664"/>
+            <a:off x="7576947" y="4169664"/>
             <a:ext cx="685800" cy="384048"/>
           </a:xfrm>
           <a:prstGeom prst="rect">
@@ -28716,7 +28716,7 @@
                 <a:ea typeface="Trebuchet MS" pitchFamily="34" charset="-122"/>
                 <a:cs typeface="Trebuchet MS" pitchFamily="34" charset="-120"/>
               </a:rPr>
-              <a:t>io</a:t>
+              <a:t>ion</a:t>
             </a:r>
             <a:endParaRPr lang="en-US" sz="900" dirty="0"/>
           </a:p>
@@ -28730,7 +28730,7 @@
         </p:nvSpPr>
         <p:spPr>
           <a:xfrm>
-            <a:off x="6870192" y="4572000"/>
+            <a:off x="7576947" y="4572000"/>
             <a:ext cx="685800" cy="219456"/>
           </a:xfrm>
           <a:prstGeom prst="rect">
@@ -28755,75 +28755,9 @@
                 <a:ea typeface="Calibri" pitchFamily="34" charset="-122"/>
                 <a:cs typeface="Calibri" pitchFamily="34" charset="-120"/>
               </a:rPr>
-              <a:t>/sh/</a:t>
+              <a:t>/shun/</a:t>
             </a:r>
             <a:endParaRPr lang="en-US" sz="750" dirty="0"/>
-          </a:p>
-        </p:txBody>
-      </p:sp>
-      <p:sp>
-        <p:nvSpPr>
-          <p:cNvPr id="58" name="Shape 56"/>
-          <p:cNvSpPr/>
-          <p:nvPr/>
-        </p:nvSpPr>
-        <p:spPr>
-          <a:xfrm>
-            <a:off x="7677912" y="4169664"/>
-            <a:ext cx="685800" cy="384048"/>
-          </a:xfrm>
-          <a:prstGeom prst="rect">
-            <a:avLst>
-              <a:gd name="adj" fmla="val 9524"/>
-            </a:avLst>
-          </a:prstGeom>
-          <a:solidFill>
-            <a:srgbClr val="FFFFFF"/>
-          </a:solidFill>
-          <a:ln w="12700">
-            <a:solidFill>
-              <a:srgbClr val="DB2777"/>
-            </a:solidFill>
-            <a:prstDash val="solid"/>
-          </a:ln>
-        </p:spPr>
-      </p:sp>
-      <p:sp>
-        <p:nvSpPr>
-          <p:cNvPr id="59" name="Text 57"/>
-          <p:cNvSpPr/>
-          <p:nvPr/>
-        </p:nvSpPr>
-        <p:spPr>
-          <a:xfrm>
-            <a:off x="7677912" y="4169664"/>
-            <a:ext cx="685800" cy="384048"/>
-          </a:xfrm>
-          <a:prstGeom prst="rect">
-            <a:avLst/>
-          </a:prstGeom>
-          <a:noFill/>
-          <a:ln/>
-        </p:spPr>
-        <p:txBody>
-          <a:bodyPr wrap="square" lIns="0" tIns="0" rIns="0" bIns="0" rtlCol="0" anchor="ctr"/>
-          <a:lstStyle/>
-          <a:p>
-            <a:pPr algn="ctr" indent="0" marL="0">
-              <a:buNone/>
-            </a:pPr>
-            <a:r>
-              <a:rPr lang="en-US" sz="900" b="1" dirty="0">
-                <a:solidFill>
-                  <a:srgbClr val="9D174D"/>
-                </a:solidFill>
-                <a:latin typeface="Trebuchet MS" pitchFamily="34" charset="0"/>
-                <a:ea typeface="Trebuchet MS" pitchFamily="34" charset="-122"/>
-                <a:cs typeface="Trebuchet MS" pitchFamily="34" charset="-120"/>
-              </a:rPr>
-              <a:t>n</a:t>
-            </a:r>
-            <a:endParaRPr lang="en-US" sz="900" dirty="0"/>
           </a:p>
         </p:txBody>
       </p:sp>
@@ -29113,7 +29047,7 @@
                 <a:ea typeface="Calibri" pitchFamily="34" charset="-122"/>
                 <a:cs typeface="Calibri" pitchFamily="34" charset="-120"/>
               </a:rPr>
-              <a:t>Word Labs  •  wordlabs.app  •  Root: 'create' = to make or bring forth</a:t>
+              <a:t>Word Labs  •  wordlabs.app  •  Root: 'create' = make or bring into existence</a:t>
             </a:r>
             <a:endParaRPr lang="en-US" sz="800" dirty="0"/>
           </a:p>
@@ -29940,7 +29874,7 @@
                 <a:ea typeface="Calibri" pitchFamily="34" charset="-122"/>
                 <a:cs typeface="Calibri" pitchFamily="34" charset="-120"/>
               </a:rPr>
-              <a:t>Word Labs  •  wordlabs.app  •  Root: 'create' = to make or bring forth</a:t>
+              <a:t>Word Labs  •  wordlabs.app  •  Root: 'create' = make or bring into existence</a:t>
             </a:r>
             <a:endParaRPr lang="en-US" sz="800" dirty="0"/>
           </a:p>
@@ -30257,7 +30191,7 @@
                 <a:ea typeface="Calibri" pitchFamily="34" charset="-122"/>
                 <a:cs typeface="Calibri" pitchFamily="34" charset="-120"/>
               </a:rPr>
-              <a:t>to make or bring forth</a:t>
+              <a:t>to make or bring into existence</a:t>
             </a:r>
             <a:endParaRPr lang="en-US" sz="850" dirty="0"/>
           </a:p>
@@ -30520,7 +30454,7 @@
                 <a:ea typeface="Calibri" pitchFamily="34" charset="-122"/>
                 <a:cs typeface="Calibri" pitchFamily="34" charset="-120"/>
               </a:rPr>
-              <a:t>the state or quality of being</a:t>
+              <a:t>state or condition of</a:t>
             </a:r>
             <a:endParaRPr lang="en-US" sz="850" dirty="0"/>
           </a:p>
@@ -31076,7 +31010,7 @@
                 <a:ea typeface="Calibri" pitchFamily="34" charset="-122"/>
                 <a:cs typeface="Calibri" pitchFamily="34" charset="-120"/>
               </a:rPr>
-              <a:t>Word Labs  •  wordlabs.app  •  Root: 'create' = to make or bring forth</a:t>
+              <a:t>Word Labs  •  wordlabs.app  •  Root: 'create' = make or bring into existence</a:t>
             </a:r>
             <a:endParaRPr lang="en-US" sz="800" dirty="0"/>
           </a:p>
@@ -31393,7 +31327,7 @@
                 <a:ea typeface="Calibri" pitchFamily="34" charset="-122"/>
                 <a:cs typeface="Calibri" pitchFamily="34" charset="-120"/>
               </a:rPr>
-              <a:t>to make or bring forth</a:t>
+              <a:t>to make or bring into existence</a:t>
             </a:r>
             <a:endParaRPr lang="en-US" sz="850" dirty="0"/>
           </a:p>
@@ -31656,7 +31590,7 @@
                 <a:ea typeface="Calibri" pitchFamily="34" charset="-122"/>
                 <a:cs typeface="Calibri" pitchFamily="34" charset="-120"/>
               </a:rPr>
-              <a:t>the state or quality of being</a:t>
+              <a:t>state or condition of</a:t>
             </a:r>
             <a:endParaRPr lang="en-US" sz="850" dirty="0"/>
           </a:p>
@@ -32659,7 +32593,7 @@
                 <a:ea typeface="Calibri" pitchFamily="34" charset="-122"/>
                 <a:cs typeface="Calibri" pitchFamily="34" charset="-120"/>
               </a:rPr>
-              <a:t>Word Labs  •  wordlabs.app  •  Root: 'create' = to make or bring forth</a:t>
+              <a:t>Word Labs  •  wordlabs.app  •  Root: 'create' = make or bring into existence</a:t>
             </a:r>
             <a:endParaRPr lang="en-US" sz="800" dirty="0"/>
           </a:p>
@@ -32976,7 +32910,7 @@
                 <a:ea typeface="Calibri" pitchFamily="34" charset="-122"/>
                 <a:cs typeface="Calibri" pitchFamily="34" charset="-120"/>
               </a:rPr>
-              <a:t>to make or bring forth</a:t>
+              <a:t>to make or bring into existence</a:t>
             </a:r>
             <a:endParaRPr lang="en-US" sz="850" dirty="0"/>
           </a:p>
@@ -33239,7 +33173,7 @@
                 <a:ea typeface="Calibri" pitchFamily="34" charset="-122"/>
                 <a:cs typeface="Calibri" pitchFamily="34" charset="-120"/>
               </a:rPr>
-              <a:t>the state or quality of being</a:t>
+              <a:t>state or condition of</a:t>
             </a:r>
             <a:endParaRPr lang="en-US" sz="850" dirty="0"/>
           </a:p>
@@ -33899,11 +33833,11 @@
         <p:spPr>
           <a:xfrm>
             <a:off x="1874520" y="4096512"/>
-            <a:ext cx="6903720" cy="658368"/>
+            <a:ext cx="6903720" cy="804672"/>
           </a:xfrm>
           <a:prstGeom prst="rect">
             <a:avLst>
-              <a:gd name="adj" fmla="val 8333"/>
+              <a:gd name="adj" fmla="val 6818"/>
             </a:avLst>
           </a:prstGeom>
           <a:solidFill>
@@ -33925,12 +33859,12 @@
         </p:nvSpPr>
         <p:spPr>
           <a:xfrm>
-            <a:off x="2023872" y="4169664"/>
-            <a:ext cx="685800" cy="475488"/>
+            <a:off x="1951330" y="4169664"/>
+            <a:ext cx="676656" cy="384048"/>
           </a:xfrm>
           <a:prstGeom prst="rect">
             <a:avLst>
-              <a:gd name="adj" fmla="val 7692"/>
+              <a:gd name="adj" fmla="val 9524"/>
             </a:avLst>
           </a:prstGeom>
           <a:solidFill>
@@ -33952,8 +33886,8 @@
         </p:nvSpPr>
         <p:spPr>
           <a:xfrm>
-            <a:off x="2023872" y="4169664"/>
-            <a:ext cx="685800" cy="475488"/>
+            <a:off x="1951330" y="4169664"/>
+            <a:ext cx="676656" cy="384048"/>
           </a:xfrm>
           <a:prstGeom prst="rect">
             <a:avLst/>
@@ -33991,12 +33925,12 @@
         </p:nvSpPr>
         <p:spPr>
           <a:xfrm>
-            <a:off x="2831592" y="4169664"/>
-            <a:ext cx="685800" cy="475488"/>
+            <a:off x="2677363" y="4169664"/>
+            <a:ext cx="676656" cy="384048"/>
           </a:xfrm>
           <a:prstGeom prst="rect">
             <a:avLst>
-              <a:gd name="adj" fmla="val 7692"/>
+              <a:gd name="adj" fmla="val 9524"/>
             </a:avLst>
           </a:prstGeom>
           <a:solidFill>
@@ -34018,8 +33952,8 @@
         </p:nvSpPr>
         <p:spPr>
           <a:xfrm>
-            <a:off x="2831592" y="4169664"/>
-            <a:ext cx="685800" cy="475488"/>
+            <a:off x="2677363" y="4169664"/>
+            <a:ext cx="676656" cy="384048"/>
           </a:xfrm>
           <a:prstGeom prst="rect">
             <a:avLst/>
@@ -34057,12 +33991,12 @@
         </p:nvSpPr>
         <p:spPr>
           <a:xfrm>
-            <a:off x="3639312" y="4169664"/>
-            <a:ext cx="685800" cy="475488"/>
+            <a:off x="3403397" y="4169664"/>
+            <a:ext cx="676656" cy="384048"/>
           </a:xfrm>
           <a:prstGeom prst="rect">
             <a:avLst>
-              <a:gd name="adj" fmla="val 7692"/>
+              <a:gd name="adj" fmla="val 9524"/>
             </a:avLst>
           </a:prstGeom>
           <a:solidFill>
@@ -34084,8 +34018,8 @@
         </p:nvSpPr>
         <p:spPr>
           <a:xfrm>
-            <a:off x="3639312" y="4169664"/>
-            <a:ext cx="685800" cy="475488"/>
+            <a:off x="3403397" y="4169664"/>
+            <a:ext cx="676656" cy="384048"/>
           </a:xfrm>
           <a:prstGeom prst="rect">
             <a:avLst/>
@@ -34123,12 +34057,12 @@
         </p:nvSpPr>
         <p:spPr>
           <a:xfrm>
-            <a:off x="4447032" y="4169664"/>
-            <a:ext cx="685800" cy="475488"/>
+            <a:off x="4129430" y="4169664"/>
+            <a:ext cx="676656" cy="384048"/>
           </a:xfrm>
           <a:prstGeom prst="rect">
             <a:avLst>
-              <a:gd name="adj" fmla="val 7692"/>
+              <a:gd name="adj" fmla="val 9524"/>
             </a:avLst>
           </a:prstGeom>
           <a:solidFill>
@@ -34150,8 +34084,8 @@
         </p:nvSpPr>
         <p:spPr>
           <a:xfrm>
-            <a:off x="4447032" y="4169664"/>
-            <a:ext cx="685800" cy="475488"/>
+            <a:off x="4129430" y="4169664"/>
+            <a:ext cx="676656" cy="384048"/>
           </a:xfrm>
           <a:prstGeom prst="rect">
             <a:avLst/>
@@ -34189,12 +34123,12 @@
         </p:nvSpPr>
         <p:spPr>
           <a:xfrm>
-            <a:off x="5254752" y="4169664"/>
-            <a:ext cx="685800" cy="475488"/>
+            <a:off x="4855464" y="4169664"/>
+            <a:ext cx="676656" cy="384048"/>
           </a:xfrm>
           <a:prstGeom prst="rect">
             <a:avLst>
-              <a:gd name="adj" fmla="val 7692"/>
+              <a:gd name="adj" fmla="val 9524"/>
             </a:avLst>
           </a:prstGeom>
           <a:solidFill>
@@ -34216,8 +34150,8 @@
         </p:nvSpPr>
         <p:spPr>
           <a:xfrm>
-            <a:off x="5254752" y="4169664"/>
-            <a:ext cx="685800" cy="475488"/>
+            <a:off x="4855464" y="4169664"/>
+            <a:ext cx="676656" cy="384048"/>
           </a:xfrm>
           <a:prstGeom prst="rect">
             <a:avLst/>
@@ -34241,7 +34175,7 @@
                 <a:ea typeface="Trebuchet MS" pitchFamily="34" charset="-122"/>
                 <a:cs typeface="Trebuchet MS" pitchFamily="34" charset="-120"/>
               </a:rPr>
-              <a:t>iv</a:t>
+              <a:t>i</a:t>
             </a:r>
             <a:endParaRPr lang="en-US" sz="900" dirty="0"/>
           </a:p>
@@ -34255,12 +34189,12 @@
         </p:nvSpPr>
         <p:spPr>
           <a:xfrm>
-            <a:off x="6062472" y="4169664"/>
-            <a:ext cx="685800" cy="475488"/>
+            <a:off x="5581498" y="4169664"/>
+            <a:ext cx="676656" cy="384048"/>
           </a:xfrm>
           <a:prstGeom prst="rect">
             <a:avLst>
-              <a:gd name="adj" fmla="val 7692"/>
+              <a:gd name="adj" fmla="val 9524"/>
             </a:avLst>
           </a:prstGeom>
           <a:solidFill>
@@ -34282,8 +34216,8 @@
         </p:nvSpPr>
         <p:spPr>
           <a:xfrm>
-            <a:off x="6062472" y="4169664"/>
-            <a:ext cx="685800" cy="475488"/>
+            <a:off x="5581498" y="4169664"/>
+            <a:ext cx="676656" cy="384048"/>
           </a:xfrm>
           <a:prstGeom prst="rect">
             <a:avLst/>
@@ -34307,7 +34241,7 @@
                 <a:ea typeface="Trebuchet MS" pitchFamily="34" charset="-122"/>
                 <a:cs typeface="Trebuchet MS" pitchFamily="34" charset="-120"/>
               </a:rPr>
-              <a:t>i</a:t>
+              <a:t>v</a:t>
             </a:r>
             <a:endParaRPr lang="en-US" sz="900" dirty="0"/>
           </a:p>
@@ -34321,12 +34255,12 @@
         </p:nvSpPr>
         <p:spPr>
           <a:xfrm>
-            <a:off x="6870192" y="4169664"/>
-            <a:ext cx="685800" cy="475488"/>
+            <a:off x="6307531" y="4169664"/>
+            <a:ext cx="676656" cy="384048"/>
           </a:xfrm>
           <a:prstGeom prst="rect">
             <a:avLst>
-              <a:gd name="adj" fmla="val 7692"/>
+              <a:gd name="adj" fmla="val 9524"/>
             </a:avLst>
           </a:prstGeom>
           <a:solidFill>
@@ -34348,8 +34282,8 @@
         </p:nvSpPr>
         <p:spPr>
           <a:xfrm>
-            <a:off x="6870192" y="4169664"/>
-            <a:ext cx="685800" cy="475488"/>
+            <a:off x="6307531" y="4169664"/>
+            <a:ext cx="676656" cy="384048"/>
           </a:xfrm>
           <a:prstGeom prst="rect">
             <a:avLst/>
@@ -34373,7 +34307,7 @@
                 <a:ea typeface="Trebuchet MS" pitchFamily="34" charset="-122"/>
                 <a:cs typeface="Trebuchet MS" pitchFamily="34" charset="-120"/>
               </a:rPr>
-              <a:t>t</a:t>
+              <a:t>i</a:t>
             </a:r>
             <a:endParaRPr lang="en-US" sz="900" dirty="0"/>
           </a:p>
@@ -34387,12 +34321,12 @@
         </p:nvSpPr>
         <p:spPr>
           <a:xfrm>
-            <a:off x="7677912" y="4169664"/>
-            <a:ext cx="685800" cy="475488"/>
+            <a:off x="7033565" y="4169664"/>
+            <a:ext cx="676656" cy="384048"/>
           </a:xfrm>
           <a:prstGeom prst="rect">
             <a:avLst>
-              <a:gd name="adj" fmla="val 7692"/>
+              <a:gd name="adj" fmla="val 9524"/>
             </a:avLst>
           </a:prstGeom>
           <a:solidFill>
@@ -34414,8 +34348,8 @@
         </p:nvSpPr>
         <p:spPr>
           <a:xfrm>
-            <a:off x="7677912" y="4169664"/>
-            <a:ext cx="685800" cy="475488"/>
+            <a:off x="7033565" y="4169664"/>
+            <a:ext cx="676656" cy="384048"/>
           </a:xfrm>
           <a:prstGeom prst="rect">
             <a:avLst/>
@@ -34439,9 +34373,114 @@
                 <a:ea typeface="Trebuchet MS" pitchFamily="34" charset="-122"/>
                 <a:cs typeface="Trebuchet MS" pitchFamily="34" charset="-120"/>
               </a:rPr>
+              <a:t>t</a:t>
+            </a:r>
+            <a:endParaRPr lang="en-US" sz="900" dirty="0"/>
+          </a:p>
+        </p:txBody>
+      </p:sp>
+      <p:sp>
+        <p:nvSpPr>
+          <p:cNvPr id="62" name="Shape 60"/>
+          <p:cNvSpPr/>
+          <p:nvPr/>
+        </p:nvSpPr>
+        <p:spPr>
+          <a:xfrm>
+            <a:off x="7759598" y="4169664"/>
+            <a:ext cx="676656" cy="384048"/>
+          </a:xfrm>
+          <a:prstGeom prst="rect">
+            <a:avLst>
+              <a:gd name="adj" fmla="val 9524"/>
+            </a:avLst>
+          </a:prstGeom>
+          <a:solidFill>
+            <a:srgbClr val="FFFFFF"/>
+          </a:solidFill>
+          <a:ln w="12700">
+            <a:solidFill>
+              <a:srgbClr val="DB2777"/>
+            </a:solidFill>
+            <a:prstDash val="solid"/>
+          </a:ln>
+        </p:spPr>
+      </p:sp>
+      <p:sp>
+        <p:nvSpPr>
+          <p:cNvPr id="63" name="Text 61"/>
+          <p:cNvSpPr/>
+          <p:nvPr/>
+        </p:nvSpPr>
+        <p:spPr>
+          <a:xfrm>
+            <a:off x="7759598" y="4169664"/>
+            <a:ext cx="676656" cy="384048"/>
+          </a:xfrm>
+          <a:prstGeom prst="rect">
+            <a:avLst/>
+          </a:prstGeom>
+          <a:noFill/>
+          <a:ln/>
+        </p:spPr>
+        <p:txBody>
+          <a:bodyPr wrap="square" lIns="0" tIns="0" rIns="0" bIns="0" rtlCol="0" anchor="ctr"/>
+          <a:lstStyle/>
+          <a:p>
+            <a:pPr algn="ctr" indent="0" marL="0">
+              <a:buNone/>
+            </a:pPr>
+            <a:r>
+              <a:rPr lang="en-US" sz="900" b="1" dirty="0">
+                <a:solidFill>
+                  <a:srgbClr val="9D174D"/>
+                </a:solidFill>
+                <a:latin typeface="Trebuchet MS" pitchFamily="34" charset="0"/>
+                <a:ea typeface="Trebuchet MS" pitchFamily="34" charset="-122"/>
+                <a:cs typeface="Trebuchet MS" pitchFamily="34" charset="-120"/>
+              </a:rPr>
               <a:t>y</a:t>
             </a:r>
             <a:endParaRPr lang="en-US" sz="900" dirty="0"/>
+          </a:p>
+        </p:txBody>
+      </p:sp>
+      <p:sp>
+        <p:nvSpPr>
+          <p:cNvPr id="64" name="Text 62"/>
+          <p:cNvSpPr/>
+          <p:nvPr/>
+        </p:nvSpPr>
+        <p:spPr>
+          <a:xfrm>
+            <a:off x="7759598" y="4572000"/>
+            <a:ext cx="676656" cy="219456"/>
+          </a:xfrm>
+          <a:prstGeom prst="rect">
+            <a:avLst/>
+          </a:prstGeom>
+          <a:noFill/>
+          <a:ln/>
+        </p:spPr>
+        <p:txBody>
+          <a:bodyPr wrap="square" lIns="0" tIns="0" rIns="0" bIns="0" rtlCol="0" anchor="t"/>
+          <a:lstStyle/>
+          <a:p>
+            <a:pPr algn="ctr" indent="0" marL="0">
+              <a:buNone/>
+            </a:pPr>
+            <a:r>
+              <a:rPr lang="en-US" sz="750" i="1" dirty="0">
+                <a:solidFill>
+                  <a:srgbClr val="94A3B8"/>
+                </a:solidFill>
+                <a:latin typeface="Calibri" pitchFamily="34" charset="0"/>
+                <a:ea typeface="Calibri" pitchFamily="34" charset="-122"/>
+                <a:cs typeface="Calibri" pitchFamily="34" charset="-120"/>
+              </a:rPr>
+              <a:t>/ee/</a:t>
+            </a:r>
+            <a:endParaRPr lang="en-US" sz="750" dirty="0"/>
           </a:p>
         </p:txBody>
       </p:sp>
@@ -34731,7 +34770,7 @@
                 <a:ea typeface="Calibri" pitchFamily="34" charset="-122"/>
                 <a:cs typeface="Calibri" pitchFamily="34" charset="-120"/>
               </a:rPr>
-              <a:t>Word Labs  •  wordlabs.app  •  Root: 'create' = to make or bring forth</a:t>
+              <a:t>Word Labs  •  wordlabs.app  •  Root: 'create' = make or bring into existence</a:t>
             </a:r>
             <a:endParaRPr lang="en-US" sz="800" dirty="0"/>
           </a:p>
@@ -35900,7 +35939,7 @@
                 <a:ea typeface="Calibri" pitchFamily="34" charset="-122"/>
                 <a:cs typeface="Calibri" pitchFamily="34" charset="-120"/>
               </a:rPr>
-              <a:t>Word Labs  •  wordlabs.app  •  Root: 'create' = to make or bring forth</a:t>
+              <a:t>Word Labs  •  wordlabs.app  •  Root: 'create' = make or bring into existence</a:t>
             </a:r>
             <a:endParaRPr lang="en-US" sz="800" dirty="0"/>
           </a:p>
@@ -36546,7 +36585,7 @@
                 <a:ea typeface="Trebuchet MS" pitchFamily="34" charset="-122"/>
                 <a:cs typeface="Trebuchet MS" pitchFamily="34" charset="-120"/>
               </a:rPr>
-              <a:t>co-</a:t>
+              <a:t>un-</a:t>
             </a:r>
             <a:endParaRPr lang="en-US" sz="1300" dirty="0"/>
           </a:p>
@@ -36699,7 +36738,7 @@
                 <a:ea typeface="Trebuchet MS" pitchFamily="34" charset="-122"/>
                 <a:cs typeface="Trebuchet MS" pitchFamily="34" charset="-120"/>
               </a:rPr>
-              <a:t>un-</a:t>
+              <a:t>co-</a:t>
             </a:r>
             <a:endParaRPr lang="en-US" sz="1300" dirty="0"/>
           </a:p>
@@ -37244,7 +37283,7 @@
                 <a:ea typeface="Trebuchet MS" pitchFamily="34" charset="-122"/>
                 <a:cs typeface="Trebuchet MS" pitchFamily="34" charset="-120"/>
               </a:rPr>
-              <a:t>creature</a:t>
+              <a:t>recreate</a:t>
             </a:r>
             <a:endParaRPr lang="en-US" sz="1200" dirty="0"/>
           </a:p>
@@ -37310,7 +37349,7 @@
                 <a:ea typeface="Trebuchet MS" pitchFamily="34" charset="-122"/>
                 <a:cs typeface="Trebuchet MS" pitchFamily="34" charset="-120"/>
               </a:rPr>
-              <a:t>recreate</a:t>
+              <a:t>creature</a:t>
             </a:r>
             <a:endParaRPr lang="en-US" sz="1200" dirty="0"/>
           </a:p>
@@ -37376,7 +37415,7 @@
                 <a:ea typeface="Trebuchet MS" pitchFamily="34" charset="-122"/>
                 <a:cs typeface="Trebuchet MS" pitchFamily="34" charset="-120"/>
               </a:rPr>
-              <a:t>recreation</a:t>
+              <a:t>creativity</a:t>
             </a:r>
             <a:endParaRPr lang="en-US" sz="1200" dirty="0"/>
           </a:p>
@@ -37442,7 +37481,7 @@
                 <a:ea typeface="Trebuchet MS" pitchFamily="34" charset="-122"/>
                 <a:cs typeface="Trebuchet MS" pitchFamily="34" charset="-120"/>
               </a:rPr>
-              <a:t>procreate</a:t>
+              <a:t>recreation</a:t>
             </a:r>
             <a:endParaRPr lang="en-US" sz="1200" dirty="0"/>
           </a:p>
@@ -37508,7 +37547,7 @@
                 <a:ea typeface="Trebuchet MS" pitchFamily="34" charset="-122"/>
                 <a:cs typeface="Trebuchet MS" pitchFamily="34" charset="-120"/>
               </a:rPr>
-              <a:t>creativity</a:t>
+              <a:t>uncreative</a:t>
             </a:r>
             <a:endParaRPr lang="en-US" sz="1200" dirty="0"/>
           </a:p>
@@ -37800,7 +37839,7 @@
                 <a:ea typeface="Calibri" pitchFamily="34" charset="-122"/>
                 <a:cs typeface="Calibri" pitchFamily="34" charset="-120"/>
               </a:rPr>
-              <a:t>Word Labs  •  wordlabs.app  •  Root: 'create' = to make or bring forth</a:t>
+              <a:t>Word Labs  •  wordlabs.app  •  Root: 'create' = make or bring into existence</a:t>
             </a:r>
             <a:endParaRPr lang="en-US" sz="800" dirty="0"/>
           </a:p>
@@ -37964,7 +38003,7 @@
                 <a:ea typeface="Calibri" pitchFamily="34" charset="-122"/>
                 <a:cs typeface="Calibri" pitchFamily="34" charset="-120"/>
               </a:rPr>
-              <a:t>The core part of a word carrying its basic meaning. For example, 'create' means 'to make or bring forth'.</a:t>
+              <a:t>The core part of a word carrying its basic meaning. For example, 'create' means 'make or bring into existence'.</a:t>
             </a:r>
             <a:endParaRPr lang="en-US" sz="1350" dirty="0"/>
           </a:p>
@@ -38584,7 +38623,7 @@
                 <a:ea typeface="Calibri" pitchFamily="34" charset="-122"/>
                 <a:cs typeface="Calibri" pitchFamily="34" charset="-120"/>
               </a:rPr>
-              <a:t>Word Labs  •  wordlabs.app  •  Root: 'create' = to make or bring forth</a:t>
+              <a:t>Word Labs  •  wordlabs.app  •  Root: 'create' = make or bring into existence</a:t>
             </a:r>
             <a:endParaRPr lang="en-US" sz="800" dirty="0"/>
           </a:p>
@@ -38696,7 +38735,7 @@
                 <a:ea typeface="Calibri" pitchFamily="34" charset="-122"/>
                 <a:cs typeface="Calibri" pitchFamily="34" charset="-120"/>
               </a:rPr>
-              <a:t>1.  The root 'create' comes from the Latin word 'creare', meaning to make.</a:t>
+              <a:t>1.  The suffix '-ive' in 'creative' makes the word into a noun.</a:t>
             </a:r>
             <a:endParaRPr lang="en-US" sz="1300" dirty="0"/>
           </a:p>
@@ -38719,11 +38758,11 @@
             </a:avLst>
           </a:prstGeom>
           <a:solidFill>
-            <a:srgbClr val="DCFCE7"/>
-          </a:solidFill>
-          <a:ln w="12700">
-            <a:solidFill>
-              <a:srgbClr val="16A34A"/>
+            <a:srgbClr val="FEE2E2"/>
+          </a:solidFill>
+          <a:ln w="12700">
+            <a:solidFill>
+              <a:srgbClr val="DC2626"/>
             </a:solidFill>
             <a:prstDash val="solid"/>
           </a:ln>
@@ -38756,13 +38795,13 @@
             <a:r>
               <a:rPr lang="en-US" sz="1100" b="1" dirty="0">
                 <a:solidFill>
-                  <a:srgbClr val="16A34A"/>
+                  <a:srgbClr val="DC2626"/>
                 </a:solidFill>
                 <a:latin typeface="Trebuchet MS" pitchFamily="34" charset="0"/>
                 <a:ea typeface="Trebuchet MS" pitchFamily="34" charset="-122"/>
                 <a:cs typeface="Trebuchet MS" pitchFamily="34" charset="-120"/>
               </a:rPr>
-              <a:t>TRUE</a:t>
+              <a:t>FALSE</a:t>
             </a:r>
             <a:endParaRPr lang="en-US" sz="1100" dirty="0"/>
           </a:p>
@@ -38835,7 +38874,7 @@
                 <a:ea typeface="Calibri" pitchFamily="34" charset="-122"/>
                 <a:cs typeface="Calibri" pitchFamily="34" charset="-120"/>
               </a:rPr>
-              <a:t>2.  The word 'creature' has nothing to do with the root 'create'.</a:t>
+              <a:t>2.  Adding the prefix 're-' to 'create' makes the word 'recreate', meaning to make again.</a:t>
             </a:r>
             <a:endParaRPr lang="en-US" sz="1300" dirty="0"/>
           </a:p>
@@ -38858,11 +38897,11 @@
             </a:avLst>
           </a:prstGeom>
           <a:solidFill>
-            <a:srgbClr val="FEE2E2"/>
-          </a:solidFill>
-          <a:ln w="12700">
-            <a:solidFill>
-              <a:srgbClr val="DC2626"/>
+            <a:srgbClr val="DCFCE7"/>
+          </a:solidFill>
+          <a:ln w="12700">
+            <a:solidFill>
+              <a:srgbClr val="16A34A"/>
             </a:solidFill>
             <a:prstDash val="solid"/>
           </a:ln>
@@ -38895,13 +38934,13 @@
             <a:r>
               <a:rPr lang="en-US" sz="1100" b="1" dirty="0">
                 <a:solidFill>
-                  <a:srgbClr val="DC2626"/>
+                  <a:srgbClr val="16A34A"/>
                 </a:solidFill>
                 <a:latin typeface="Trebuchet MS" pitchFamily="34" charset="0"/>
                 <a:ea typeface="Trebuchet MS" pitchFamily="34" charset="-122"/>
                 <a:cs typeface="Trebuchet MS" pitchFamily="34" charset="-120"/>
               </a:rPr>
-              <a:t>FALSE</a:t>
+              <a:t>TRUE</a:t>
             </a:r>
             <a:endParaRPr lang="en-US" sz="1100" dirty="0"/>
           </a:p>
@@ -38974,7 +39013,7 @@
                 <a:ea typeface="Calibri" pitchFamily="34" charset="-122"/>
                 <a:cs typeface="Calibri" pitchFamily="34" charset="-120"/>
               </a:rPr>
-              <a:t>3.  A 'creator' is someone who makes or brings something new into the world.</a:t>
+              <a:t>3.  The word 'creature' has nothing to do with the root 'create'.</a:t>
             </a:r>
             <a:endParaRPr lang="en-US" sz="1300" dirty="0"/>
           </a:p>
@@ -38997,11 +39036,11 @@
             </a:avLst>
           </a:prstGeom>
           <a:solidFill>
-            <a:srgbClr val="DCFCE7"/>
-          </a:solidFill>
-          <a:ln w="12700">
-            <a:solidFill>
-              <a:srgbClr val="16A34A"/>
+            <a:srgbClr val="FEE2E2"/>
+          </a:solidFill>
+          <a:ln w="12700">
+            <a:solidFill>
+              <a:srgbClr val="DC2626"/>
             </a:solidFill>
             <a:prstDash val="solid"/>
           </a:ln>
@@ -39034,13 +39073,13 @@
             <a:r>
               <a:rPr lang="en-US" sz="1100" b="1" dirty="0">
                 <a:solidFill>
-                  <a:srgbClr val="16A34A"/>
+                  <a:srgbClr val="DC2626"/>
                 </a:solidFill>
                 <a:latin typeface="Trebuchet MS" pitchFamily="34" charset="0"/>
                 <a:ea typeface="Trebuchet MS" pitchFamily="34" charset="-122"/>
                 <a:cs typeface="Trebuchet MS" pitchFamily="34" charset="-120"/>
               </a:rPr>
-              <a:t>TRUE</a:t>
+              <a:t>FALSE</a:t>
             </a:r>
             <a:endParaRPr lang="en-US" sz="1100" dirty="0"/>
           </a:p>
@@ -39113,7 +39152,7 @@
                 <a:ea typeface="Calibri" pitchFamily="34" charset="-122"/>
                 <a:cs typeface="Calibri" pitchFamily="34" charset="-120"/>
               </a:rPr>
-              <a:t>4.  The word 'recreation' contains the prefix 're-', meaning again.</a:t>
+              <a:t>4.  A 'creator' is someone who makes or brings something new into existence.</a:t>
             </a:r>
             <a:endParaRPr lang="en-US" sz="1300" dirty="0"/>
           </a:p>
@@ -39252,7 +39291,7 @@
                 <a:ea typeface="Calibri" pitchFamily="34" charset="-122"/>
                 <a:cs typeface="Calibri" pitchFamily="34" charset="-120"/>
               </a:rPr>
-              <a:t>5.  The suffix '-ive' in 'creative' means the action of doing something.</a:t>
+              <a:t>5.  The root 'create' comes from the Latin word 'creare'.</a:t>
             </a:r>
             <a:endParaRPr lang="en-US" sz="1300" dirty="0"/>
           </a:p>
@@ -39275,11 +39314,11 @@
             </a:avLst>
           </a:prstGeom>
           <a:solidFill>
-            <a:srgbClr val="FEE2E2"/>
-          </a:solidFill>
-          <a:ln w="12700">
-            <a:solidFill>
-              <a:srgbClr val="DC2626"/>
+            <a:srgbClr val="DCFCE7"/>
+          </a:solidFill>
+          <a:ln w="12700">
+            <a:solidFill>
+              <a:srgbClr val="16A34A"/>
             </a:solidFill>
             <a:prstDash val="solid"/>
           </a:ln>
@@ -39312,13 +39351,13 @@
             <a:r>
               <a:rPr lang="en-US" sz="1100" b="1" dirty="0">
                 <a:solidFill>
-                  <a:srgbClr val="DC2626"/>
+                  <a:srgbClr val="16A34A"/>
                 </a:solidFill>
                 <a:latin typeface="Trebuchet MS" pitchFamily="34" charset="0"/>
                 <a:ea typeface="Trebuchet MS" pitchFamily="34" charset="-122"/>
                 <a:cs typeface="Trebuchet MS" pitchFamily="34" charset="-120"/>
               </a:rPr>
-              <a:t>FALSE</a:t>
+              <a:t>TRUE</a:t>
             </a:r>
             <a:endParaRPr lang="en-US" sz="1100" dirty="0"/>
           </a:p>
@@ -39610,7 +39649,7 @@
                 <a:ea typeface="Calibri" pitchFamily="34" charset="-122"/>
                 <a:cs typeface="Calibri" pitchFamily="34" charset="-120"/>
               </a:rPr>
-              <a:t>Word Labs  •  wordlabs.app  •  Root: 'create' = to make or bring forth</a:t>
+              <a:t>Word Labs  •  wordlabs.app  •  Root: 'create' = make or bring into existence</a:t>
             </a:r>
             <a:endParaRPr lang="en-US" sz="800" dirty="0"/>
           </a:p>
@@ -39747,7 +39786,7 @@
                 <a:ea typeface="Trebuchet MS" pitchFamily="34" charset="-122"/>
                 <a:cs typeface="Trebuchet MS" pitchFamily="34" charset="-120"/>
               </a:rPr>
-              <a:t>to make or bring forth</a:t>
+              <a:t>make or bring into existence</a:t>
             </a:r>
             <a:endParaRPr lang="en-US" sz="2000" dirty="0"/>
           </a:p>
@@ -40089,7 +40128,7 @@
                 <a:ea typeface="Trebuchet MS" pitchFamily="34" charset="-122"/>
                 <a:cs typeface="Trebuchet MS" pitchFamily="34" charset="-120"/>
               </a:rPr>
-              <a:t>creature</a:t>
+              <a:t>recreate</a:t>
             </a:r>
             <a:endParaRPr lang="en-US" sz="1300" dirty="0"/>
           </a:p>
@@ -40155,7 +40194,7 @@
                 <a:ea typeface="Trebuchet MS" pitchFamily="34" charset="-122"/>
                 <a:cs typeface="Trebuchet MS" pitchFamily="34" charset="-120"/>
               </a:rPr>
-              <a:t>recreate</a:t>
+              <a:t>creature</a:t>
             </a:r>
             <a:endParaRPr lang="en-US" sz="1300" dirty="0"/>
           </a:p>
@@ -40221,7 +40260,7 @@
                 <a:ea typeface="Trebuchet MS" pitchFamily="34" charset="-122"/>
                 <a:cs typeface="Trebuchet MS" pitchFamily="34" charset="-120"/>
               </a:rPr>
-              <a:t>recreation</a:t>
+              <a:t>creativity</a:t>
             </a:r>
             <a:endParaRPr lang="en-US" sz="1300" dirty="0"/>
           </a:p>
@@ -40287,7 +40326,7 @@
                 <a:ea typeface="Trebuchet MS" pitchFamily="34" charset="-122"/>
                 <a:cs typeface="Trebuchet MS" pitchFamily="34" charset="-120"/>
               </a:rPr>
-              <a:t>procreate</a:t>
+              <a:t>recreation</a:t>
             </a:r>
             <a:endParaRPr lang="en-US" sz="1300" dirty="0"/>
           </a:p>
@@ -40579,7 +40618,7 @@
                 <a:ea typeface="Calibri" pitchFamily="34" charset="-122"/>
                 <a:cs typeface="Calibri" pitchFamily="34" charset="-120"/>
               </a:rPr>
-              <a:t>Word Labs  •  wordlabs.app  •  Root: 'create' = to make or bring forth</a:t>
+              <a:t>Word Labs  •  wordlabs.app  •  Root: 'create' = make or bring into existence</a:t>
             </a:r>
             <a:endParaRPr lang="en-US" sz="800" dirty="0"/>
           </a:p>
@@ -41225,7 +41264,7 @@
                 <a:ea typeface="Trebuchet MS" pitchFamily="34" charset="-122"/>
                 <a:cs typeface="Trebuchet MS" pitchFamily="34" charset="-120"/>
               </a:rPr>
-              <a:t>co-</a:t>
+              <a:t>un-</a:t>
             </a:r>
             <a:endParaRPr lang="en-US" sz="1300" dirty="0"/>
           </a:p>
@@ -41378,7 +41417,7 @@
                 <a:ea typeface="Trebuchet MS" pitchFamily="34" charset="-122"/>
                 <a:cs typeface="Trebuchet MS" pitchFamily="34" charset="-120"/>
               </a:rPr>
-              <a:t>un-</a:t>
+              <a:t>co-</a:t>
             </a:r>
             <a:endParaRPr lang="en-US" sz="1300" dirty="0"/>
           </a:p>
@@ -42353,7 +42392,7 @@
                 <a:ea typeface="Calibri" pitchFamily="34" charset="-122"/>
                 <a:cs typeface="Calibri" pitchFamily="34" charset="-120"/>
               </a:rPr>
-              <a:t>Word Labs  •  wordlabs.app  •  Root: 'create' = to make or bring forth</a:t>
+              <a:t>Word Labs  •  wordlabs.app  •  Root: 'create' = make or bring into existence</a:t>
             </a:r>
             <a:endParaRPr lang="en-US" sz="800" dirty="0"/>
           </a:p>
@@ -42531,7 +42570,7 @@
                 <a:ea typeface="Calibri" pitchFamily="34" charset="-122"/>
                 <a:cs typeface="Calibri" pitchFamily="34" charset="-120"/>
               </a:rPr>
-              <a:t>To produce offspring or have babies — used when talking about animals or people reproducing.</a:t>
+              <a:t>A fun activity you do in your spare time to relax and enjoy yourself.</a:t>
             </a:r>
             <a:endParaRPr lang="en-US" sz="1200" dirty="0"/>
           </a:p>
@@ -42670,7 +42709,7 @@
                 <a:ea typeface="Calibri" pitchFamily="34" charset="-122"/>
                 <a:cs typeface="Calibri" pitchFamily="34" charset="-120"/>
               </a:rPr>
-              <a:t>A living being, especially an animal.</a:t>
+              <a:t>To make or do something again, or to enjoy a fun activity in your free time.</a:t>
             </a:r>
             <a:endParaRPr lang="en-US" sz="1200" dirty="0"/>
           </a:p>
@@ -42809,7 +42848,7 @@
                 <a:ea typeface="Calibri" pitchFamily="34" charset="-122"/>
                 <a:cs typeface="Calibri" pitchFamily="34" charset="-120"/>
               </a:rPr>
-              <a:t>Fun activities you do in your spare time, like sport or hobbies.</a:t>
+              <a:t>The ability to use your imagination to come up with new ideas or make new things.</a:t>
             </a:r>
             <a:endParaRPr lang="en-US" sz="1200" dirty="0"/>
           </a:p>
@@ -42882,7 +42921,7 @@
                 <a:ea typeface="Trebuchet MS" pitchFamily="34" charset="-122"/>
                 <a:cs typeface="Trebuchet MS" pitchFamily="34" charset="-120"/>
               </a:rPr>
-              <a:t>creature</a:t>
+              <a:t>recreate</a:t>
             </a:r>
             <a:endParaRPr lang="en-US" sz="1200" dirty="0"/>
           </a:p>
@@ -42948,7 +42987,7 @@
                 <a:ea typeface="Calibri" pitchFamily="34" charset="-122"/>
                 <a:cs typeface="Calibri" pitchFamily="34" charset="-120"/>
               </a:rPr>
-              <a:t>To make or do something again, or to enjoy a fun activity.</a:t>
+              <a:t>A living animal or being that has been brought into existence.</a:t>
             </a:r>
             <a:endParaRPr lang="en-US" sz="1200" dirty="0"/>
           </a:p>
@@ -43021,7 +43060,7 @@
                 <a:ea typeface="Trebuchet MS" pitchFamily="34" charset="-122"/>
                 <a:cs typeface="Trebuchet MS" pitchFamily="34" charset="-120"/>
               </a:rPr>
-              <a:t>recreate</a:t>
+              <a:t>creature</a:t>
             </a:r>
             <a:endParaRPr lang="en-US" sz="1200" dirty="0"/>
           </a:p>
@@ -43087,7 +43126,7 @@
                 <a:ea typeface="Calibri" pitchFamily="34" charset="-122"/>
                 <a:cs typeface="Calibri" pitchFamily="34" charset="-120"/>
               </a:rPr>
-              <a:t>Something that has been made or brought into existence, like a piece of art or a new invention.</a:t>
+              <a:t>Something that has been made or brought into existence for the first time.</a:t>
             </a:r>
             <a:endParaRPr lang="en-US" sz="1200" dirty="0"/>
           </a:p>
@@ -43160,7 +43199,7 @@
                 <a:ea typeface="Trebuchet MS" pitchFamily="34" charset="-122"/>
                 <a:cs typeface="Trebuchet MS" pitchFamily="34" charset="-120"/>
               </a:rPr>
-              <a:t>recreation</a:t>
+              <a:t>creativity</a:t>
             </a:r>
             <a:endParaRPr lang="en-US" sz="1200" dirty="0"/>
           </a:p>
@@ -43299,7 +43338,7 @@
                 <a:ea typeface="Trebuchet MS" pitchFamily="34" charset="-122"/>
                 <a:cs typeface="Trebuchet MS" pitchFamily="34" charset="-120"/>
               </a:rPr>
-              <a:t>procreate</a:t>
+              <a:t>recreation</a:t>
             </a:r>
             <a:endParaRPr lang="en-US" sz="1200" dirty="0"/>
           </a:p>
@@ -43365,7 +43404,7 @@
                 <a:ea typeface="Calibri" pitchFamily="34" charset="-122"/>
                 <a:cs typeface="Calibri" pitchFamily="34" charset="-120"/>
               </a:rPr>
-              <a:t>Having the ability to make new and imaginative things.</a:t>
+              <a:t>Having the ability to use imagination to make new and interesting things.</a:t>
             </a:r>
             <a:endParaRPr lang="en-US" sz="1200" dirty="0"/>
           </a:p>
@@ -43657,7 +43696,7 @@
                 <a:ea typeface="Calibri" pitchFamily="34" charset="-122"/>
                 <a:cs typeface="Calibri" pitchFamily="34" charset="-120"/>
               </a:rPr>
-              <a:t>Word Labs  •  wordlabs.app  •  Root: 'create' = to make or bring forth</a:t>
+              <a:t>Word Labs  •  wordlabs.app  •  Root: 'create' = make or bring into existence</a:t>
             </a:r>
             <a:endParaRPr lang="en-US" sz="800" dirty="0"/>
           </a:p>
@@ -43860,7 +43899,7 @@
                 <a:ea typeface="Calibri" pitchFamily="34" charset="-122"/>
                 <a:cs typeface="Calibri" pitchFamily="34" charset="-120"/>
               </a:rPr>
-              <a:t>The students used recycled materials to create a model of the solar system.</a:t>
+              <a:t>The students were given time to be creative and design their own inventions using recycled materials.</a:t>
             </a:r>
             <a:endParaRPr lang="en-US" sz="1500" dirty="0"/>
           </a:p>
@@ -44024,7 +44063,7 @@
                 <a:ea typeface="Calibri" pitchFamily="34" charset="-122"/>
                 <a:cs typeface="Calibri" pitchFamily="34" charset="-120"/>
               </a:rPr>
-              <a:t>Our art teacher said that being creative means trying new ideas without being afraid of mistakes.</a:t>
+              <a:t>The young artist felt a rush of excitement as she saw her latest creation come to life on the canvas.</a:t>
             </a:r>
             <a:endParaRPr lang="en-US" sz="1500" dirty="0"/>
           </a:p>
@@ -44188,7 +44227,7 @@
                 <a:ea typeface="Calibri" pitchFamily="34" charset="-122"/>
                 <a:cs typeface="Calibri" pitchFamily="34" charset="-120"/>
               </a:rPr>
-              <a:t>During recreation time, the children played handball and skipped rope in the playground.</a:t>
+              <a:t>Our teacher encouraged us to use our creativity when writing our imaginative stories this term.</a:t>
             </a:r>
             <a:endParaRPr lang="en-US" sz="1500" dirty="0"/>
           </a:p>
